--- a/Smart Agriculture Big Data — Final Review.pptx
+++ b/Smart Agriculture Big Data — Final Review.pptx
@@ -599,7 +599,7 @@
           <a:p>
             <a:r>
               <a:rPr lang="en-US" dirty="0"/>
-              <a:t>Replace the GitHub placeholder. Then switch to the live demo: HDFS at localhost:9870, YARN at localhost:8088, Spark History at localhost:18080, Kafka UI at localhost:8080.</a:t>
+              <a:t>Show the GitHub repository, then switch to the live demo: HDFS at localhost:9870, YARN at localhost:8088, Spark History at localhost:18080, Kafka UI at localhost:8080.</a:t>
             </a:r>
             <a:endParaRPr lang="en-US" dirty="0"/>
           </a:p>
@@ -2109,11 +2109,11 @@
         <p:spPr>
           <a:xfrm>
             <a:off x="1333500" y="457200"/>
-            <a:ext cx="9525000" cy="1555750"/>
+            <a:ext cx="9525000" cy="1993900"/>
           </a:xfrm>
           <a:prstGeom prst="roundRect">
             <a:avLst>
-              <a:gd name="adj" fmla="val 6531"/>
+              <a:gd name="adj" fmla="val 5096"/>
             </a:avLst>
           </a:prstGeom>
           <a:solidFill>
@@ -2139,8 +2139,8 @@
         </p:nvSpPr>
         <p:spPr>
           <a:xfrm>
-            <a:off x="1654405" y="711200"/>
-            <a:ext cx="8883111" cy="463550"/>
+            <a:off x="1609217" y="711200"/>
+            <a:ext cx="8973566" cy="901700"/>
           </a:xfrm>
           <a:prstGeom prst="rect">
             <a:avLst/>
@@ -2169,7 +2169,7 @@
                 <a:ea typeface="Arial" pitchFamily="34" charset="-122"/>
                 <a:cs typeface="Arial" pitchFamily="34" charset="-120"/>
               </a:rPr>
-              <a:t>A Big Data Pipeline for Smart Agriculture</a:t>
+              <a:t>Smart Agriculture Big Data Analytics with Scala and Spark</a:t>
             </a:r>
             <a:endParaRPr lang="en-US" sz="3000" dirty="0"/>
           </a:p>
@@ -2183,7 +2183,7 @@
         </p:nvSpPr>
         <p:spPr>
           <a:xfrm>
-            <a:off x="1609217" y="1225550"/>
+            <a:off x="1609217" y="1663700"/>
             <a:ext cx="8973566" cy="558800"/>
           </a:xfrm>
           <a:prstGeom prst="rect">
@@ -2227,7 +2227,7 @@
         </p:nvSpPr>
         <p:spPr>
           <a:xfrm>
-            <a:off x="3302000" y="2241550"/>
+            <a:off x="3302000" y="2679700"/>
             <a:ext cx="3401060" cy="292100"/>
           </a:xfrm>
           <a:prstGeom prst="rect">
@@ -2271,7 +2271,7 @@
         </p:nvSpPr>
         <p:spPr>
           <a:xfrm>
-            <a:off x="6604000" y="2241550"/>
+            <a:off x="6604000" y="2679700"/>
             <a:ext cx="2354580" cy="292100"/>
           </a:xfrm>
           <a:prstGeom prst="rect">
@@ -2315,7 +2315,7 @@
         </p:nvSpPr>
         <p:spPr>
           <a:xfrm>
-            <a:off x="3302000" y="2508250"/>
+            <a:off x="3302000" y="2946400"/>
             <a:ext cx="3401060" cy="292100"/>
           </a:xfrm>
           <a:prstGeom prst="rect">
@@ -2359,7 +2359,7 @@
         </p:nvSpPr>
         <p:spPr>
           <a:xfrm>
-            <a:off x="6604000" y="2508250"/>
+            <a:off x="6604000" y="2946400"/>
             <a:ext cx="2354580" cy="292100"/>
           </a:xfrm>
           <a:prstGeom prst="rect">
@@ -2403,7 +2403,7 @@
         </p:nvSpPr>
         <p:spPr>
           <a:xfrm>
-            <a:off x="3302000" y="2774950"/>
+            <a:off x="3302000" y="3213100"/>
             <a:ext cx="3401060" cy="292100"/>
           </a:xfrm>
           <a:prstGeom prst="rect">
@@ -2447,7 +2447,7 @@
         </p:nvSpPr>
         <p:spPr>
           <a:xfrm>
-            <a:off x="6604000" y="2774950"/>
+            <a:off x="6604000" y="3213100"/>
             <a:ext cx="2354580" cy="292100"/>
           </a:xfrm>
           <a:prstGeom prst="rect">
@@ -2491,7 +2491,7 @@
         </p:nvSpPr>
         <p:spPr>
           <a:xfrm>
-            <a:off x="3302000" y="3041650"/>
+            <a:off x="3302000" y="3479800"/>
             <a:ext cx="3401060" cy="292100"/>
           </a:xfrm>
           <a:prstGeom prst="rect">
@@ -2535,7 +2535,7 @@
         </p:nvSpPr>
         <p:spPr>
           <a:xfrm>
-            <a:off x="6604000" y="3041650"/>
+            <a:off x="6604000" y="3479800"/>
             <a:ext cx="2354580" cy="292100"/>
           </a:xfrm>
           <a:prstGeom prst="rect">
@@ -2579,7 +2579,7 @@
         </p:nvSpPr>
         <p:spPr>
           <a:xfrm>
-            <a:off x="4777740" y="3536950"/>
+            <a:off x="4777740" y="3975100"/>
             <a:ext cx="3163729" cy="292100"/>
           </a:xfrm>
           <a:prstGeom prst="rect">
@@ -2623,7 +2623,7 @@
         </p:nvSpPr>
         <p:spPr>
           <a:xfrm>
-            <a:off x="4539250" y="3841750"/>
+            <a:off x="4539250" y="4279900"/>
             <a:ext cx="3113342" cy="292100"/>
           </a:xfrm>
           <a:prstGeom prst="rect">
@@ -2667,7 +2667,7 @@
         </p:nvSpPr>
         <p:spPr>
           <a:xfrm>
-            <a:off x="5058362" y="4146550"/>
+            <a:off x="5058362" y="4584700"/>
             <a:ext cx="2075117" cy="274320"/>
           </a:xfrm>
           <a:prstGeom prst="rect">
@@ -3462,62 +3462,25 @@
                 <a:ea typeface="Arial" pitchFamily="34" charset="-122"/>
                 <a:cs typeface="Arial" pitchFamily="34" charset="-120"/>
               </a:rPr>
-              <a:t> [your GitHub repository link]</a:t>
-            </a:r>
-            <a:endParaRPr lang="en-US" sz="1400" dirty="0"/>
-          </a:p>
-        </p:txBody>
-      </p:sp>
-      <p:sp>
-        <p:nvSpPr>
-          <p:cNvPr id="12" name="Text 10"/>
-          <p:cNvSpPr/>
-          <p:nvPr/>
-        </p:nvSpPr>
-        <p:spPr>
-          <a:xfrm>
-            <a:off x="609600" y="4013200"/>
-            <a:ext cx="11301984" cy="274320"/>
-          </a:xfrm>
-          <a:prstGeom prst="rect">
-            <a:avLst/>
-          </a:prstGeom>
-          <a:noFill/>
-          <a:ln/>
-        </p:spPr>
-        <p:txBody>
-          <a:bodyPr wrap="square" lIns="0" tIns="0" rIns="0" bIns="0" rtlCol="0" anchor="t">
-            <a:normAutofit/>
-          </a:bodyPr>
-          <a:lstStyle/>
-          <a:p>
-            <a:pPr algn="l" indent="0" marL="0">
-              <a:lnSpc>
-                <a:spcPts val="1960"/>
-              </a:lnSpc>
-              <a:buNone/>
-            </a:pPr>
-            <a:r>
-              <a:rPr lang="en-US" sz="1400" b="1" dirty="0">
-                <a:solidFill>
-                  <a:srgbClr val="1E1E1E"/>
-                </a:solidFill>
-                <a:latin typeface="Arial" pitchFamily="34" charset="0"/>
-                <a:ea typeface="Arial" pitchFamily="34" charset="-122"/>
-                <a:cs typeface="Arial" pitchFamily="34" charset="-120"/>
-              </a:rPr>
-              <a:t>Uploaded:</a:t>
-            </a:r>
-            <a:r>
-              <a:rPr lang="en-US" sz="1400" dirty="0">
-                <a:solidFill>
-                  <a:srgbClr val="1E1E1E"/>
-                </a:solidFill>
-                <a:latin typeface="Arial" pitchFamily="34" charset="0"/>
-                <a:ea typeface="Arial" pitchFamily="34" charset="-122"/>
-                <a:cs typeface="Arial" pitchFamily="34" charset="-120"/>
-              </a:rPr>
-              <a:t> this presentation and the project report</a:t>
+              <a:t> </a:t>
+            </a:r>
+            <a:r>
+              <a:rPr lang="en-US" sz="1400" u="sng" dirty="0">
+                <a:solidFill>
+                  <a:srgbClr val="1E1E1E"/>
+                </a:solidFill>
+                <a:latin typeface="Arial" pitchFamily="34" charset="0"/>
+                <a:ea typeface="Arial" pitchFamily="34" charset="-122"/>
+                <a:cs typeface="Arial" pitchFamily="34" charset="-120"/>
+                <a:hlinkClick r:id="rId1" invalidUrl="" action="" tgtFrame="" tooltip="" history="1" highlightClick="0" endSnd="0">
+                  <a:extLst>
+                    <a:ext uri="{A12FA001-AC4F-418D-AE19-62706E023703}">
+                      <ahyp:hlinkClr xmlns:ahyp="http://schemas.microsoft.com/office/drawing/2018/hyperlinkcolor" val="tx"/>
+                    </a:ext>
+                  </a:extLst>
+                </a:hlinkClick>
+              </a:rPr>
+              <a:t>github.com/chaitanyajayasurya-afk/Smart-Agriculture-with-Hadoop-Spark-and-kafka-</a:t>
             </a:r>
             <a:endParaRPr lang="en-US" sz="1400" dirty="0"/>
           </a:p>
@@ -4459,7 +4422,7 @@
                 <a:ea typeface="Arial" pitchFamily="34" charset="-122"/>
                 <a:cs typeface="Arial" pitchFamily="34" charset="-120"/>
               </a:rPr>
-              <a:t>Dataset: source, size, the 4 V’s and key attributes</a:t>
+              <a:t>Dataset: source, size, the 5 V’s and key attributes</a:t>
             </a:r>
             <a:endParaRPr lang="en-US" sz="2600" dirty="0"/>
           </a:p>
@@ -6293,8 +6256,8 @@
         </p:nvSpPr>
         <p:spPr>
           <a:xfrm>
-            <a:off x="554482" y="3345180"/>
-            <a:ext cx="6278626" cy="1225550"/>
+            <a:off x="554482" y="3294380"/>
+            <a:ext cx="6278626" cy="1412240"/>
           </a:xfrm>
           <a:prstGeom prst="rect">
             <a:avLst/>
@@ -6310,7 +6273,7 @@
           <a:p>
             <a:pPr algn="l" marL="156718" indent="-156718">
               <a:lnSpc>
-                <a:spcPts val="1890"/>
+                <a:spcPts val="1820"/>
               </a:lnSpc>
               <a:buSzPct val="100000"/>
               <a:buChar char="•"/>
@@ -6342,7 +6305,7 @@
           <a:p>
             <a:pPr algn="l" marL="156718" indent="-156718">
               <a:lnSpc>
-                <a:spcPts val="1890"/>
+                <a:spcPts val="1820"/>
               </a:lnSpc>
               <a:buSzPct val="100000"/>
               <a:buChar char="•"/>
@@ -6374,7 +6337,7 @@
           <a:p>
             <a:pPr algn="l" marL="156718" indent="-156718">
               <a:lnSpc>
-                <a:spcPts val="1890"/>
+                <a:spcPts val="1820"/>
               </a:lnSpc>
               <a:buSzPct val="100000"/>
               <a:buChar char="•"/>
@@ -6406,7 +6369,7 @@
           <a:p>
             <a:pPr algn="l" marL="156718" indent="-156718">
               <a:lnSpc>
-                <a:spcPts val="1890"/>
+                <a:spcPts val="1820"/>
               </a:lnSpc>
               <a:buSzPct val="100000"/>
               <a:buChar char="•"/>
@@ -6435,6 +6398,38 @@
             </a:r>
             <a:endParaRPr lang="en-US" sz="1400" dirty="0"/>
           </a:p>
+          <a:p>
+            <a:pPr algn="l" marL="156718" indent="-156718">
+              <a:lnSpc>
+                <a:spcPts val="1820"/>
+              </a:lnSpc>
+              <a:buSzPct val="100000"/>
+              <a:buChar char="•"/>
+            </a:pPr>
+            <a:r>
+              <a:rPr lang="en-US" sz="1400" b="1" dirty="0">
+                <a:solidFill>
+                  <a:srgbClr val="1E1E1E"/>
+                </a:solidFill>
+                <a:latin typeface="Arial" pitchFamily="34" charset="0"/>
+                <a:ea typeface="Arial" pitchFamily="34" charset="-122"/>
+                <a:cs typeface="Arial" pitchFamily="34" charset="-120"/>
+              </a:rPr>
+              <a:t>Value:</a:t>
+            </a:r>
+            <a:r>
+              <a:rPr lang="en-US" sz="1400" dirty="0">
+                <a:solidFill>
+                  <a:srgbClr val="1E1E1E"/>
+                </a:solidFill>
+                <a:latin typeface="Arial" pitchFamily="34" charset="0"/>
+                <a:ea typeface="Arial" pitchFamily="34" charset="-122"/>
+                <a:cs typeface="Arial" pitchFamily="34" charset="-120"/>
+              </a:rPr>
+              <a:t> next-pass stress prediction and live disease alerts for 19,916 fields</a:t>
+            </a:r>
+            <a:endParaRPr lang="en-US" sz="1400" dirty="0"/>
+          </a:p>
         </p:txBody>
       </p:sp>
       <p:sp>
@@ -6445,7 +6440,7 @@
         </p:nvSpPr>
         <p:spPr>
           <a:xfrm>
-            <a:off x="457200" y="4621530"/>
+            <a:off x="457200" y="4757420"/>
             <a:ext cx="6383528" cy="487680"/>
           </a:xfrm>
           <a:prstGeom prst="rect">
@@ -6507,7 +6502,7 @@
         </p:blipFill>
         <p:spPr>
           <a:xfrm>
-            <a:off x="6915150" y="3351530"/>
+            <a:off x="6915150" y="3300730"/>
             <a:ext cx="4813300" cy="2641600"/>
           </a:xfrm>
           <a:prstGeom prst="roundRect">
@@ -6525,7 +6520,7 @@
         </p:nvSpPr>
         <p:spPr>
           <a:xfrm>
-            <a:off x="6911975" y="3348355"/>
+            <a:off x="6911975" y="3297555"/>
             <a:ext cx="4819650" cy="2647950"/>
           </a:xfrm>
           <a:prstGeom prst="roundRect">
